--- a/docs/poster/variants/v08.pptx
+++ b/docs/poster/variants/v08.pptx
@@ -4287,6 +4287,90 @@
               </a:spcAft>
             </a:pPr>
             <a:r>
+              <a:rPr sz="6200" b="1">
+                <a:solidFill>
+                  <a:srgbClr val="1B7A55"/>
+                </a:solidFill>
+                <a:latin typeface="Georgia"/>
+              </a:rPr>
+              <a:t>1,389</a:t>
+            </a:r>
+          </a:p>
+        </p:txBody>
+      </p:sp>
+      <p:sp>
+        <p:nvSpPr>
+          <p:cNvPr id="31" name="TextBox 30"/>
+          <p:cNvSpPr txBox="1"/>
+          <p:nvPr/>
+        </p:nvSpPr>
+        <p:spPr>
+          <a:xfrm>
+            <a:off x="731520" y="17096740"/>
+            <a:ext cx="10607040" cy="365760"/>
+          </a:xfrm>
+          <a:prstGeom prst="rect">
+            <a:avLst/>
+          </a:prstGeom>
+          <a:noFill/>
+        </p:spPr>
+        <p:txBody>
+          <a:bodyPr wrap="square" lIns="0" rIns="0" tIns="0" bIns="0">
+            <a:spAutoFit/>
+          </a:bodyPr>
+          <a:lstStyle/>
+          <a:p>
+            <a:pPr algn="l">
+              <a:lnSpc>
+                <a:spcPct val="122000"/>
+              </a:lnSpc>
+              <a:spcAft>
+                <a:spcPts val="600"/>
+              </a:spcAft>
+            </a:pPr>
+            <a:r>
+              <a:rPr sz="1700" b="0">
+                <a:solidFill>
+                  <a:srgbClr val="5C6B62"/>
+                </a:solidFill>
+                <a:latin typeface="Arial"/>
+              </a:rPr>
+              <a:t>joystick commands through the platform</a:t>
+            </a:r>
+          </a:p>
+        </p:txBody>
+      </p:sp>
+      <p:sp>
+        <p:nvSpPr>
+          <p:cNvPr id="32" name="TextBox 31"/>
+          <p:cNvSpPr txBox="1"/>
+          <p:nvPr/>
+        </p:nvSpPr>
+        <p:spPr>
+          <a:xfrm>
+            <a:off x="731520" y="17582642"/>
+            <a:ext cx="10607040" cy="365760"/>
+          </a:xfrm>
+          <a:prstGeom prst="rect">
+            <a:avLst/>
+          </a:prstGeom>
+          <a:noFill/>
+        </p:spPr>
+        <p:txBody>
+          <a:bodyPr wrap="square" lIns="0" rIns="0" tIns="0" bIns="0">
+            <a:spAutoFit/>
+          </a:bodyPr>
+          <a:lstStyle/>
+          <a:p>
+            <a:pPr algn="l">
+              <a:lnSpc>
+                <a:spcPct val="95000"/>
+              </a:lnSpc>
+              <a:spcAft>
+                <a:spcPts val="0"/>
+              </a:spcAft>
+            </a:pPr>
+            <a:r>
               <a:rPr sz="3600" b="1">
                 <a:solidFill>
                   <a:srgbClr val="1F3D2B"/>
@@ -4300,13 +4384,13 @@
       </p:sp>
       <p:sp>
         <p:nvSpPr>
-          <p:cNvPr id="31" name="Rectangle 30"/>
+          <p:cNvPr id="33" name="Rectangle 32"/>
           <p:cNvSpPr/>
           <p:nvPr/>
         </p:nvSpPr>
         <p:spPr>
           <a:xfrm>
-            <a:off x="731520" y="16887952"/>
+            <a:off x="731520" y="18177001"/>
             <a:ext cx="10607040" cy="27432"/>
           </a:xfrm>
           <a:prstGeom prst="rect">
@@ -4344,13 +4428,13 @@
       </p:sp>
       <p:sp>
         <p:nvSpPr>
-          <p:cNvPr id="32" name="TextBox 31"/>
+          <p:cNvPr id="34" name="TextBox 33"/>
           <p:cNvSpPr txBox="1"/>
           <p:nvPr/>
         </p:nvSpPr>
         <p:spPr>
           <a:xfrm>
-            <a:off x="731520" y="17217136"/>
+            <a:off x="731520" y="18506185"/>
             <a:ext cx="10607040" cy="365760"/>
           </a:xfrm>
           <a:prstGeom prst="rect">
@@ -4386,13 +4470,13 @@
       </p:sp>
       <p:sp>
         <p:nvSpPr>
-          <p:cNvPr id="33" name="TextBox 32"/>
+          <p:cNvPr id="35" name="TextBox 34"/>
           <p:cNvSpPr txBox="1"/>
           <p:nvPr/>
         </p:nvSpPr>
         <p:spPr>
           <a:xfrm>
-            <a:off x="731520" y="19666204"/>
+            <a:off x="731520" y="20955254"/>
             <a:ext cx="10607040" cy="365760"/>
           </a:xfrm>
           <a:prstGeom prst="rect">
@@ -4428,13 +4512,13 @@
       </p:sp>
       <p:sp>
         <p:nvSpPr>
-          <p:cNvPr id="34" name="Rectangle 33"/>
+          <p:cNvPr id="36" name="Rectangle 35"/>
           <p:cNvSpPr/>
           <p:nvPr/>
         </p:nvSpPr>
         <p:spPr>
           <a:xfrm>
-            <a:off x="731520" y="20260563"/>
+            <a:off x="731520" y="21549613"/>
             <a:ext cx="10607040" cy="27432"/>
           </a:xfrm>
           <a:prstGeom prst="rect">
@@ -4472,7 +4556,7 @@
       </p:sp>
       <p:pic>
         <p:nvPicPr>
-          <p:cNvPr id="35" name="Picture 34" descr="l_robots.png"/>
+          <p:cNvPr id="37" name="Picture 36" descr="l_robots.png"/>
           <p:cNvPicPr>
             <a:picLocks noChangeAspect="1"/>
           </p:cNvPicPr>
@@ -4486,7 +4570,7 @@
         </p:blipFill>
         <p:spPr>
           <a:xfrm>
-            <a:off x="731520" y="20589747"/>
+            <a:off x="731520" y="21878797"/>
             <a:ext cx="10607040" cy="2377440"/>
           </a:xfrm>
           <a:prstGeom prst="rect">
@@ -4496,13 +4580,13 @@
       </p:pic>
       <p:sp>
         <p:nvSpPr>
-          <p:cNvPr id="36" name="TextBox 35"/>
+          <p:cNvPr id="38" name="TextBox 37"/>
           <p:cNvSpPr txBox="1"/>
           <p:nvPr/>
         </p:nvSpPr>
         <p:spPr>
           <a:xfrm>
-            <a:off x="731520" y="23076916"/>
+            <a:off x="731520" y="24365966"/>
             <a:ext cx="10607040" cy="365760"/>
           </a:xfrm>
           <a:prstGeom prst="rect">
@@ -4538,13 +4622,13 @@
       </p:sp>
       <p:sp>
         <p:nvSpPr>
-          <p:cNvPr id="37" name="TextBox 36"/>
+          <p:cNvPr id="39" name="TextBox 38"/>
           <p:cNvSpPr txBox="1"/>
           <p:nvPr/>
         </p:nvSpPr>
         <p:spPr>
           <a:xfrm>
-            <a:off x="731520" y="24406860"/>
+            <a:off x="731520" y="25695910"/>
             <a:ext cx="10607040" cy="365760"/>
           </a:xfrm>
           <a:prstGeom prst="rect">
@@ -4580,13 +4664,13 @@
       </p:sp>
       <p:sp>
         <p:nvSpPr>
-          <p:cNvPr id="38" name="TextBox 37"/>
+          <p:cNvPr id="40" name="TextBox 39"/>
           <p:cNvSpPr txBox="1"/>
           <p:nvPr/>
         </p:nvSpPr>
         <p:spPr>
           <a:xfrm>
-            <a:off x="731520" y="26174192"/>
+            <a:off x="11704320" y="12920980"/>
             <a:ext cx="10607040" cy="365760"/>
           </a:xfrm>
           <a:prstGeom prst="rect">
@@ -4615,20 +4699,20 @@
                 </a:solidFill>
                 <a:latin typeface="Georgia"/>
               </a:rPr>
-              <a:t>Only one robot has the button</a:t>
-            </a:r>
-          </a:p>
-        </p:txBody>
-      </p:sp>
-      <p:sp>
-        <p:nvSpPr>
-          <p:cNvPr id="39" name="Rectangle 38"/>
+              <a:t>Robots on the platform today</a:t>
+            </a:r>
+          </a:p>
+        </p:txBody>
+      </p:sp>
+      <p:sp>
+        <p:nvSpPr>
+          <p:cNvPr id="41" name="Rectangle 40"/>
           <p:cNvSpPr/>
           <p:nvPr/>
         </p:nvSpPr>
         <p:spPr>
           <a:xfrm>
-            <a:off x="731520" y="26768552"/>
+            <a:off x="11704320" y="13515340"/>
             <a:ext cx="10607040" cy="27432"/>
           </a:xfrm>
           <a:prstGeom prst="rect">
@@ -4666,13 +4750,13 @@
       </p:sp>
       <p:sp>
         <p:nvSpPr>
-          <p:cNvPr id="40" name="TextBox 39"/>
+          <p:cNvPr id="42" name="TextBox 41"/>
           <p:cNvSpPr txBox="1"/>
           <p:nvPr/>
         </p:nvSpPr>
         <p:spPr>
           <a:xfrm>
-            <a:off x="731520" y="27097736"/>
+            <a:off x="11704320" y="13844523"/>
             <a:ext cx="10607040" cy="365760"/>
           </a:xfrm>
           <a:prstGeom prst="rect">
@@ -4701,20 +4785,20 @@
                 </a:solidFill>
                 <a:latin typeface="Arial"/>
               </a:rPr>
-              <a:t>The Drive button appears on the 241 project and not on the laser cart's, because the allow-list holds one target. The rover has been dark since 2026-08-28: the platform answers a drive request today with its own offline page. The cart has never been drivable from the platform.</a:t>
-            </a:r>
-          </a:p>
-        </p:txBody>
-      </p:sp>
-      <p:sp>
-        <p:nvSpPr>
-          <p:cNvPr id="41" name="TextBox 40"/>
+              <a:t>Robot 241 is a tracked rover that drives crop rows and streams camera, GPS and two IMUs. The laser cart carries the weeder: a galvanometer laser, a down camera over the work zone and a forward camera. Ten projects sit on the platform and two of them have a robot reporting into them. Between those two vehicles, 2,686 frames in 26 drives.</a:t>
+            </a:r>
+          </a:p>
+        </p:txBody>
+      </p:sp>
+      <p:sp>
+        <p:nvSpPr>
+          <p:cNvPr id="43" name="TextBox 42"/>
           <p:cNvSpPr txBox="1"/>
           <p:nvPr/>
         </p:nvSpPr>
         <p:spPr>
           <a:xfrm>
-            <a:off x="11704320" y="12920980"/>
+            <a:off x="11704320" y="16293592"/>
             <a:ext cx="10607040" cy="365760"/>
           </a:xfrm>
           <a:prstGeom prst="rect">
@@ -4737,26 +4821,110 @@
               </a:spcAft>
             </a:pPr>
             <a:r>
-              <a:rPr sz="3600" b="1">
-                <a:solidFill>
-                  <a:srgbClr val="1F3D2B"/>
+              <a:rPr sz="6200" b="1">
+                <a:solidFill>
+                  <a:srgbClr val="1B7A55"/>
                 </a:solidFill>
                 <a:latin typeface="Georgia"/>
               </a:rPr>
-              <a:t>Robots on the platform today</a:t>
-            </a:r>
-          </a:p>
-        </p:txBody>
-      </p:sp>
-      <p:sp>
-        <p:nvSpPr>
-          <p:cNvPr id="42" name="Rectangle 41"/>
+              <a:t>14</a:t>
+            </a:r>
+          </a:p>
+        </p:txBody>
+      </p:sp>
+      <p:sp>
+        <p:nvSpPr>
+          <p:cNvPr id="44" name="TextBox 43"/>
+          <p:cNvSpPr txBox="1"/>
+          <p:nvPr/>
+        </p:nvSpPr>
+        <p:spPr>
+          <a:xfrm>
+            <a:off x="11704320" y="17096740"/>
+            <a:ext cx="10607040" cy="365760"/>
+          </a:xfrm>
+          <a:prstGeom prst="rect">
+            <a:avLst/>
+          </a:prstGeom>
+          <a:noFill/>
+        </p:spPr>
+        <p:txBody>
+          <a:bodyPr wrap="square" lIns="0" rIns="0" tIns="0" bIns="0">
+            <a:spAutoFit/>
+          </a:bodyPr>
+          <a:lstStyle/>
+          <a:p>
+            <a:pPr algn="l">
+              <a:lnSpc>
+                <a:spcPct val="122000"/>
+              </a:lnSpc>
+              <a:spcAft>
+                <a:spcPts val="600"/>
+              </a:spcAft>
+            </a:pPr>
+            <a:r>
+              <a:rPr sz="1700" b="0">
+                <a:solidFill>
+                  <a:srgbClr val="5C6B62"/>
+                </a:solidFill>
+                <a:latin typeface="Arial"/>
+              </a:rPr>
+              <a:t>analysis tools the planner can choose from</a:t>
+            </a:r>
+          </a:p>
+        </p:txBody>
+      </p:sp>
+      <p:sp>
+        <p:nvSpPr>
+          <p:cNvPr id="45" name="TextBox 44"/>
+          <p:cNvSpPr txBox="1"/>
+          <p:nvPr/>
+        </p:nvSpPr>
+        <p:spPr>
+          <a:xfrm>
+            <a:off x="11704320" y="17582642"/>
+            <a:ext cx="10607040" cy="365760"/>
+          </a:xfrm>
+          <a:prstGeom prst="rect">
+            <a:avLst/>
+          </a:prstGeom>
+          <a:noFill/>
+        </p:spPr>
+        <p:txBody>
+          <a:bodyPr wrap="square" lIns="0" rIns="0" tIns="0" bIns="0">
+            <a:spAutoFit/>
+          </a:bodyPr>
+          <a:lstStyle/>
+          <a:p>
+            <a:pPr algn="l">
+              <a:lnSpc>
+                <a:spcPct val="95000"/>
+              </a:lnSpc>
+              <a:spcAft>
+                <a:spcPts val="0"/>
+              </a:spcAft>
+            </a:pPr>
+            <a:r>
+              <a:rPr sz="3600" b="1">
+                <a:solidFill>
+                  <a:srgbClr val="1F3D2B"/>
+                </a:solidFill>
+                <a:latin typeface="Georgia"/>
+              </a:rPr>
+              <a:t>Ask a dataset what it is good for</a:t>
+            </a:r>
+          </a:p>
+        </p:txBody>
+      </p:sp>
+      <p:sp>
+        <p:nvSpPr>
+          <p:cNvPr id="46" name="Rectangle 45"/>
           <p:cNvSpPr/>
           <p:nvPr/>
         </p:nvSpPr>
         <p:spPr>
           <a:xfrm>
-            <a:off x="11704320" y="13515340"/>
+            <a:off x="11704320" y="18177001"/>
             <a:ext cx="10607040" cy="27432"/>
           </a:xfrm>
           <a:prstGeom prst="rect">
@@ -4794,13 +4962,13 @@
       </p:sp>
       <p:sp>
         <p:nvSpPr>
-          <p:cNvPr id="43" name="TextBox 42"/>
+          <p:cNvPr id="47" name="TextBox 46"/>
           <p:cNvSpPr txBox="1"/>
           <p:nvPr/>
         </p:nvSpPr>
         <p:spPr>
           <a:xfrm>
-            <a:off x="11704320" y="13844523"/>
+            <a:off x="11704320" y="18506185"/>
             <a:ext cx="10607040" cy="365760"/>
           </a:xfrm>
           <a:prstGeom prst="rect">
@@ -4829,20 +4997,20 @@
                 </a:solidFill>
                 <a:latin typeface="Arial"/>
               </a:rPr>
-              <a:t>Robot 241 is a tracked rover that drives crop rows and streams camera, GPS and two IMUs. The laser cart carries the weeder: a galvanometer laser, a down camera over the work zone and a forward camera. A Unitree humanoid has a project and has uploaded nothing yet. Between them the two ground vehicles have recorded 2,686 frames in 26 drives.</a:t>
-            </a:r>
-          </a:p>
-        </p:txBody>
-      </p:sp>
-      <p:sp>
-        <p:nvSpPr>
-          <p:cNvPr id="44" name="TextBox 43"/>
+              <a:t>Every dataset page carries a chat box. A user types or speaks a plain question about that dataset. A planner reads the question and the dataset's real column profile, then picks from 14 fixed analysis tools or writes new code. The answer comes back with the chart and the code that produced it.</a:t>
+            </a:r>
+          </a:p>
+        </p:txBody>
+      </p:sp>
+      <p:sp>
+        <p:nvSpPr>
+          <p:cNvPr id="48" name="TextBox 47"/>
           <p:cNvSpPr txBox="1"/>
           <p:nvPr/>
         </p:nvSpPr>
         <p:spPr>
           <a:xfrm>
-            <a:off x="11704320" y="16293592"/>
+            <a:off x="11704320" y="20614386"/>
             <a:ext cx="10607040" cy="365760"/>
           </a:xfrm>
           <a:prstGeom prst="rect">
@@ -4871,20 +5039,20 @@
                 </a:solidFill>
                 <a:latin typeface="Georgia"/>
               </a:rPr>
-              <a:t>Ask a dataset what it is good for</a:t>
-            </a:r>
-          </a:p>
-        </p:txBody>
-      </p:sp>
-      <p:sp>
-        <p:nvSpPr>
-          <p:cNvPr id="45" name="Rectangle 44"/>
+              <a:t>On disk today</a:t>
+            </a:r>
+          </a:p>
+        </p:txBody>
+      </p:sp>
+      <p:sp>
+        <p:nvSpPr>
+          <p:cNvPr id="49" name="Rectangle 48"/>
           <p:cNvSpPr/>
           <p:nvPr/>
         </p:nvSpPr>
         <p:spPr>
           <a:xfrm>
-            <a:off x="11704320" y="16887952"/>
+            <a:off x="11704320" y="21208745"/>
             <a:ext cx="10607040" cy="27432"/>
           </a:xfrm>
           <a:prstGeom prst="rect">
@@ -4922,13 +5090,13 @@
       </p:sp>
       <p:sp>
         <p:nvSpPr>
-          <p:cNvPr id="46" name="TextBox 45"/>
+          <p:cNvPr id="50" name="TextBox 49"/>
           <p:cNvSpPr txBox="1"/>
           <p:nvPr/>
         </p:nvSpPr>
         <p:spPr>
           <a:xfrm>
-            <a:off x="11704320" y="17217136"/>
+            <a:off x="11704320" y="21537929"/>
             <a:ext cx="10607040" cy="365760"/>
           </a:xfrm>
           <a:prstGeom prst="rect">
@@ -4957,20 +5125,20 @@
                 </a:solidFill>
                 <a:latin typeface="Arial"/>
               </a:rPr>
-              <a:t>Every dataset page carries a chat box. A user types or speaks a plain question about that dataset. A planner reads the question and the dataset's real column profile, then picks from 14 fixed analysis tools or writes new code. The answer comes back with the chart and the code that produced it.</a:t>
-            </a:r>
-          </a:p>
-        </p:txBody>
-      </p:sp>
-      <p:sp>
-        <p:nvSpPr>
-          <p:cNvPr id="47" name="TextBox 46"/>
+              <a:t>Two robots have put 2,686 camera frames and 91,955 telemetry rows across nine streams onto the platform, over 26 drives, with 342 m of GPS track from 1,502 fixes. None of the frames is labelled.</a:t>
+            </a:r>
+          </a:p>
+        </p:txBody>
+      </p:sp>
+      <p:sp>
+        <p:nvSpPr>
+          <p:cNvPr id="51" name="TextBox 50"/>
           <p:cNvSpPr txBox="1"/>
           <p:nvPr/>
         </p:nvSpPr>
         <p:spPr>
           <a:xfrm>
-            <a:off x="11704320" y="19325336"/>
+            <a:off x="11704320" y="23305262"/>
             <a:ext cx="10607040" cy="365760"/>
           </a:xfrm>
           <a:prstGeom prst="rect">
@@ -4993,26 +5161,110 @@
               </a:spcAft>
             </a:pPr>
             <a:r>
-              <a:rPr sz="3600" b="1">
-                <a:solidFill>
-                  <a:srgbClr val="1F3D2B"/>
+              <a:rPr sz="6200" b="1">
+                <a:solidFill>
+                  <a:srgbClr val="1B7A55"/>
                 </a:solidFill>
                 <a:latin typeface="Georgia"/>
               </a:rPr>
-              <a:t>On disk today</a:t>
-            </a:r>
-          </a:p>
-        </p:txBody>
-      </p:sp>
-      <p:sp>
-        <p:nvSpPr>
-          <p:cNvPr id="48" name="Rectangle 47"/>
+              <a:t>92</a:t>
+            </a:r>
+          </a:p>
+        </p:txBody>
+      </p:sp>
+      <p:sp>
+        <p:nvSpPr>
+          <p:cNvPr id="52" name="TextBox 51"/>
+          <p:cNvSpPr txBox="1"/>
+          <p:nvPr/>
+        </p:nvSpPr>
+        <p:spPr>
+          <a:xfrm>
+            <a:off x="11704320" y="24108410"/>
+            <a:ext cx="10607040" cy="365760"/>
+          </a:xfrm>
+          <a:prstGeom prst="rect">
+            <a:avLst/>
+          </a:prstGeom>
+          <a:noFill/>
+        </p:spPr>
+        <p:txBody>
+          <a:bodyPr wrap="square" lIns="0" rIns="0" tIns="0" bIns="0">
+            <a:spAutoFit/>
+          </a:bodyPr>
+          <a:lstStyle/>
+          <a:p>
+            <a:pPr algn="l">
+              <a:lnSpc>
+                <a:spcPct val="122000"/>
+              </a:lnSpc>
+              <a:spcAft>
+                <a:spcPts val="600"/>
+              </a:spcAft>
+            </a:pPr>
+            <a:r>
+              <a:rPr sz="1700" b="0">
+                <a:solidFill>
+                  <a:srgbClr val="5C6B62"/>
+                </a:solidFill>
+                <a:latin typeface="Arial"/>
+              </a:rPr>
+              <a:t>questions asked of a dataset so far</a:t>
+            </a:r>
+          </a:p>
+        </p:txBody>
+      </p:sp>
+      <p:sp>
+        <p:nvSpPr>
+          <p:cNvPr id="53" name="TextBox 52"/>
+          <p:cNvSpPr txBox="1"/>
+          <p:nvPr/>
+        </p:nvSpPr>
+        <p:spPr>
+          <a:xfrm>
+            <a:off x="11704320" y="24594312"/>
+            <a:ext cx="10607040" cy="365760"/>
+          </a:xfrm>
+          <a:prstGeom prst="rect">
+            <a:avLst/>
+          </a:prstGeom>
+          <a:noFill/>
+        </p:spPr>
+        <p:txBody>
+          <a:bodyPr wrap="square" lIns="0" rIns="0" tIns="0" bIns="0">
+            <a:spAutoFit/>
+          </a:bodyPr>
+          <a:lstStyle/>
+          <a:p>
+            <a:pPr algn="l">
+              <a:lnSpc>
+                <a:spcPct val="95000"/>
+              </a:lnSpc>
+              <a:spcAft>
+                <a:spcPts val="0"/>
+              </a:spcAft>
+            </a:pPr>
+            <a:r>
+              <a:rPr sz="3600" b="1">
+                <a:solidFill>
+                  <a:srgbClr val="1F3D2B"/>
+                </a:solidFill>
+                <a:latin typeface="Georgia"/>
+              </a:rPr>
+              <a:t>Asked something it had never seen</a:t>
+            </a:r>
+          </a:p>
+        </p:txBody>
+      </p:sp>
+      <p:sp>
+        <p:nvSpPr>
+          <p:cNvPr id="54" name="Rectangle 53"/>
           <p:cNvSpPr/>
           <p:nvPr/>
         </p:nvSpPr>
         <p:spPr>
           <a:xfrm>
-            <a:off x="11704320" y="19919696"/>
+            <a:off x="11704320" y="25188671"/>
             <a:ext cx="10607040" cy="27432"/>
           </a:xfrm>
           <a:prstGeom prst="rect">
@@ -5050,13 +5302,13 @@
       </p:sp>
       <p:sp>
         <p:nvSpPr>
-          <p:cNvPr id="49" name="TextBox 48"/>
+          <p:cNvPr id="55" name="TextBox 54"/>
           <p:cNvSpPr txBox="1"/>
           <p:nvPr/>
         </p:nvSpPr>
         <p:spPr>
           <a:xfrm>
-            <a:off x="11704320" y="20248879"/>
+            <a:off x="11704320" y="25517855"/>
             <a:ext cx="10607040" cy="365760"/>
           </a:xfrm>
           <a:prstGeom prst="rect">
@@ -5085,263 +5337,7 @@
                 </a:solidFill>
                 <a:latin typeface="Arial"/>
               </a:rPr>
-              <a:t>Two robots have put 2,686 camera frames and 91,955 telemetry rows across nine streams onto the platform, over 26 drives, with 342 m of GPS track from 1,502 fixes. None of the frames is labelled.</a:t>
-            </a:r>
-          </a:p>
-        </p:txBody>
-      </p:sp>
-      <p:sp>
-        <p:nvSpPr>
-          <p:cNvPr id="50" name="TextBox 49"/>
-          <p:cNvSpPr txBox="1"/>
-          <p:nvPr/>
-        </p:nvSpPr>
-        <p:spPr>
-          <a:xfrm>
-            <a:off x="11704320" y="22016212"/>
-            <a:ext cx="10607040" cy="365760"/>
-          </a:xfrm>
-          <a:prstGeom prst="rect">
-            <a:avLst/>
-          </a:prstGeom>
-          <a:noFill/>
-        </p:spPr>
-        <p:txBody>
-          <a:bodyPr wrap="square" lIns="0" rIns="0" tIns="0" bIns="0">
-            <a:spAutoFit/>
-          </a:bodyPr>
-          <a:lstStyle/>
-          <a:p>
-            <a:pPr algn="l">
-              <a:lnSpc>
-                <a:spcPct val="95000"/>
-              </a:lnSpc>
-              <a:spcAft>
-                <a:spcPts val="0"/>
-              </a:spcAft>
-            </a:pPr>
-            <a:r>
-              <a:rPr sz="3600" b="1">
-                <a:solidFill>
-                  <a:srgbClr val="1F3D2B"/>
-                </a:solidFill>
-                <a:latin typeface="Georgia"/>
-              </a:rPr>
-              <a:t>Asked something it had never seen</a:t>
-            </a:r>
-          </a:p>
-        </p:txBody>
-      </p:sp>
-      <p:sp>
-        <p:nvSpPr>
-          <p:cNvPr id="51" name="Rectangle 50"/>
-          <p:cNvSpPr/>
-          <p:nvPr/>
-        </p:nvSpPr>
-        <p:spPr>
-          <a:xfrm>
-            <a:off x="11704320" y="22610572"/>
-            <a:ext cx="10607040" cy="27432"/>
-          </a:xfrm>
-          <a:prstGeom prst="rect">
-            <a:avLst/>
-          </a:prstGeom>
-          <a:solidFill>
-            <a:srgbClr val="1B7A55"/>
-          </a:solidFill>
-          <a:ln>
-            <a:noFill/>
-          </a:ln>
-          <a:effectLst/>
-        </p:spPr>
-        <p:style>
-          <a:lnRef idx="1">
-            <a:schemeClr val="accent1"/>
-          </a:lnRef>
-          <a:fillRef idx="3">
-            <a:schemeClr val="accent1"/>
-          </a:fillRef>
-          <a:effectRef idx="2">
-            <a:schemeClr val="accent1"/>
-          </a:effectRef>
-          <a:fontRef idx="minor">
-            <a:schemeClr val="lt1"/>
-          </a:fontRef>
-        </p:style>
-        <p:txBody>
-          <a:bodyPr rtlCol="0" anchor="ctr"/>
-          <a:lstStyle/>
-          <a:p>
-            <a:pPr algn="ctr"/>
-          </a:p>
-        </p:txBody>
-      </p:sp>
-      <p:sp>
-        <p:nvSpPr>
-          <p:cNvPr id="52" name="TextBox 51"/>
-          <p:cNvSpPr txBox="1"/>
-          <p:nvPr/>
-        </p:nvSpPr>
-        <p:spPr>
-          <a:xfrm>
-            <a:off x="11704320" y="22939755"/>
-            <a:ext cx="10607040" cy="365760"/>
-          </a:xfrm>
-          <a:prstGeom prst="rect">
-            <a:avLst/>
-          </a:prstGeom>
-          <a:noFill/>
-        </p:spPr>
-        <p:txBody>
-          <a:bodyPr wrap="square" lIns="0" rIns="0" tIns="0" bIns="0">
-            <a:spAutoFit/>
-          </a:bodyPr>
-          <a:lstStyle/>
-          <a:p>
-            <a:pPr algn="l">
-              <a:lnSpc>
-                <a:spcPct val="122000"/>
-              </a:lnSpc>
-              <a:spcAft>
-                <a:spcPts val="1400"/>
-              </a:spcAft>
-            </a:pPr>
-            <a:r>
-              <a:rPr sz="2200" b="0">
-                <a:solidFill>
-                  <a:srgbClr val="1C2A22"/>
-                </a:solidFill>
-                <a:latin typeface="Arial"/>
-              </a:rPr>
               <a:t>Asked to plot a histogram of the heading change rate on the 241 field drive, the agent wrote the code and returned the plot on the first attempt. A fixed template cannot do that, because nothing in the platform knew that question would be asked. Across the platform, 9 datasets carry 92 turns of that conversation.</a:t>
-            </a:r>
-          </a:p>
-        </p:txBody>
-      </p:sp>
-      <p:sp>
-        <p:nvSpPr>
-          <p:cNvPr id="53" name="TextBox 52"/>
-          <p:cNvSpPr txBox="1"/>
-          <p:nvPr/>
-        </p:nvSpPr>
-        <p:spPr>
-          <a:xfrm>
-            <a:off x="11704320" y="25388824"/>
-            <a:ext cx="10607040" cy="365760"/>
-          </a:xfrm>
-          <a:prstGeom prst="rect">
-            <a:avLst/>
-          </a:prstGeom>
-          <a:noFill/>
-        </p:spPr>
-        <p:txBody>
-          <a:bodyPr wrap="square" lIns="0" rIns="0" tIns="0" bIns="0">
-            <a:spAutoFit/>
-          </a:bodyPr>
-          <a:lstStyle/>
-          <a:p>
-            <a:pPr algn="l">
-              <a:lnSpc>
-                <a:spcPct val="95000"/>
-              </a:lnSpc>
-              <a:spcAft>
-                <a:spcPts val="0"/>
-              </a:spcAft>
-            </a:pPr>
-            <a:r>
-              <a:rPr sz="3600" b="1">
-                <a:solidFill>
-                  <a:srgbClr val="1F3D2B"/>
-                </a:solidFill>
-                <a:latin typeface="Georgia"/>
-              </a:rPr>
-              <a:t>More web data, less accuracy</a:t>
-            </a:r>
-          </a:p>
-        </p:txBody>
-      </p:sp>
-      <p:sp>
-        <p:nvSpPr>
-          <p:cNvPr id="54" name="Rectangle 53"/>
-          <p:cNvSpPr/>
-          <p:nvPr/>
-        </p:nvSpPr>
-        <p:spPr>
-          <a:xfrm>
-            <a:off x="11704320" y="25983183"/>
-            <a:ext cx="10607040" cy="27432"/>
-          </a:xfrm>
-          <a:prstGeom prst="rect">
-            <a:avLst/>
-          </a:prstGeom>
-          <a:solidFill>
-            <a:srgbClr val="1B7A55"/>
-          </a:solidFill>
-          <a:ln>
-            <a:noFill/>
-          </a:ln>
-          <a:effectLst/>
-        </p:spPr>
-        <p:style>
-          <a:lnRef idx="1">
-            <a:schemeClr val="accent1"/>
-          </a:lnRef>
-          <a:fillRef idx="3">
-            <a:schemeClr val="accent1"/>
-          </a:fillRef>
-          <a:effectRef idx="2">
-            <a:schemeClr val="accent1"/>
-          </a:effectRef>
-          <a:fontRef idx="minor">
-            <a:schemeClr val="lt1"/>
-          </a:fontRef>
-        </p:style>
-        <p:txBody>
-          <a:bodyPr rtlCol="0" anchor="ctr"/>
-          <a:lstStyle/>
-          <a:p>
-            <a:pPr algn="ctr"/>
-          </a:p>
-        </p:txBody>
-      </p:sp>
-      <p:sp>
-        <p:nvSpPr>
-          <p:cNvPr id="55" name="TextBox 54"/>
-          <p:cNvSpPr txBox="1"/>
-          <p:nvPr/>
-        </p:nvSpPr>
-        <p:spPr>
-          <a:xfrm>
-            <a:off x="11704320" y="26312367"/>
-            <a:ext cx="10607040" cy="365760"/>
-          </a:xfrm>
-          <a:prstGeom prst="rect">
-            <a:avLst/>
-          </a:prstGeom>
-          <a:noFill/>
-        </p:spPr>
-        <p:txBody>
-          <a:bodyPr wrap="square" lIns="0" rIns="0" tIns="0" bIns="0">
-            <a:spAutoFit/>
-          </a:bodyPr>
-          <a:lstStyle/>
-          <a:p>
-            <a:pPr algn="l">
-              <a:lnSpc>
-                <a:spcPct val="122000"/>
-              </a:lnSpc>
-              <a:spcAft>
-                <a:spcPts val="1400"/>
-              </a:spcAft>
-            </a:pPr>
-            <a:r>
-              <a:rPr sz="2200" b="0">
-                <a:solidFill>
-                  <a:srgbClr val="1C2A22"/>
-                </a:solidFill>
-                <a:latin typeface="Arial"/>
-              </a:rPr>
-              <a:t>Twelve times the training data costs 0.0189 on our own 1,977-image holdout, three seeds at every rung, which is 8.2 times the seed spread. The same eight checkpoints fall on a second weed dataset too. One of six audited web sources reaches a 0.90 label-precision bar.</a:t>
             </a:r>
           </a:p>
         </p:txBody>
